--- a/projects/NLP_Newspaper_CUAI/NLP 1팀 최종.pptx
+++ b/projects/NLP_Newspaper_CUAI/NLP 1팀 최종.pptx
@@ -8521,57 +8521,100 @@
       </p:sp>
       <p:pic>
         <p:nvPicPr>
-          <p:cNvPr id="2050" name="Picture 2">
+          <p:cNvPr id="7" name="그림 6">
             <a:extLst>
               <a:ext uri="{FF2B5EF4-FFF2-40B4-BE49-F238E27FC236}">
-                <a16:creationId xmlns:a16="http://schemas.microsoft.com/office/drawing/2014/main" id="{BE526CA3-D046-9EB8-EB41-93A1D942EE1B}"/>
+                <a16:creationId xmlns:a16="http://schemas.microsoft.com/office/drawing/2014/main" id="{293AE056-DA16-A82D-DD7F-629E5B2163B6}"/>
               </a:ext>
             </a:extLst>
           </p:cNvPr>
           <p:cNvPicPr>
-            <a:picLocks noChangeAspect="1" noChangeArrowheads="1"/>
+            <a:picLocks noChangeAspect="1"/>
           </p:cNvPicPr>
           <p:nvPr/>
         </p:nvPicPr>
         <p:blipFill>
-          <a:blip r:embed="rId4">
-            <a:extLst>
-              <a:ext uri="{28A0092B-C50C-407E-A947-70E740481C1C}">
-                <a14:useLocalDpi xmlns:a14="http://schemas.microsoft.com/office/drawing/2010/main" val="0"/>
-              </a:ext>
-            </a:extLst>
-          </a:blip>
-          <a:srcRect/>
+          <a:blip r:embed="rId4"/>
           <a:stretch>
             <a:fillRect/>
           </a:stretch>
         </p:blipFill>
-        <p:spPr bwMode="auto">
+        <p:spPr>
           <a:xfrm>
-            <a:off x="4789169" y="1055550"/>
-            <a:ext cx="3368636" cy="2178084"/>
+            <a:off x="1578839" y="1504122"/>
+            <a:ext cx="2924583" cy="2419688"/>
+          </a:xfrm>
+          <a:prstGeom prst="rect">
+            <a:avLst/>
+          </a:prstGeom>
+        </p:spPr>
+      </p:pic>
+      <p:sp>
+        <p:nvSpPr>
+          <p:cNvPr id="8" name="TextBox 7">
+            <a:extLst>
+              <a:ext uri="{FF2B5EF4-FFF2-40B4-BE49-F238E27FC236}">
+                <a16:creationId xmlns:a16="http://schemas.microsoft.com/office/drawing/2014/main" id="{026F5AC5-0B6B-D7EA-F918-9B251AD22C41}"/>
+              </a:ext>
+            </a:extLst>
+          </p:cNvPr>
+          <p:cNvSpPr txBox="1"/>
+          <p:nvPr/>
+        </p:nvSpPr>
+        <p:spPr>
+          <a:xfrm>
+            <a:off x="4732020" y="3531395"/>
+            <a:ext cx="3695700" cy="261610"/>
           </a:xfrm>
           <a:prstGeom prst="rect">
             <a:avLst/>
           </a:prstGeom>
           <a:noFill/>
-          <a:extLst>
-            <a:ext uri="{909E8E84-426E-40DD-AFC4-6F175D3DCCD1}">
-              <a14:hiddenFill xmlns:a14="http://schemas.microsoft.com/office/drawing/2010/main">
-                <a:solidFill>
-                  <a:srgbClr val="FFFFFF"/>
-                </a:solidFill>
-              </a14:hiddenFill>
-            </a:ext>
-          </a:extLst>
-        </p:spPr>
-      </p:pic>
+        </p:spPr>
+        <p:txBody>
+          <a:bodyPr wrap="square" rtlCol="0">
+            <a:spAutoFit/>
+          </a:bodyPr>
+          <a:lstStyle/>
+          <a:p>
+            <a:pPr algn="ctr"/>
+            <a:r>
+              <a:rPr lang="en-US" altLang="ko-KR" sz="1100" b="1" dirty="0"/>
+              <a:t>- </a:t>
+            </a:r>
+            <a:r>
+              <a:rPr lang="ko-KR" altLang="en-US" sz="1100" b="1" dirty="0"/>
+              <a:t>총 </a:t>
+            </a:r>
+            <a:r>
+              <a:rPr lang="en-US" altLang="ko-KR" sz="1100" b="1" dirty="0"/>
+              <a:t>800</a:t>
+            </a:r>
+            <a:r>
+              <a:rPr lang="ko-KR" altLang="en-US" sz="1100" b="1" dirty="0"/>
+              <a:t>번의 </a:t>
+            </a:r>
+            <a:r>
+              <a:rPr lang="en-US" altLang="ko-KR" sz="1100" b="1" dirty="0"/>
+              <a:t>Step</a:t>
+            </a:r>
+            <a:r>
+              <a:rPr lang="ko-KR" altLang="en-US" sz="1100" b="1"/>
+              <a:t>을 거친 </a:t>
+            </a:r>
+            <a:r>
+              <a:rPr lang="ko-KR" altLang="en-US" sz="1100" b="1" dirty="0"/>
+              <a:t>결과물을 통해 예측 결과 생성</a:t>
+            </a:r>
+          </a:p>
+        </p:txBody>
+      </p:sp>
       <p:pic>
         <p:nvPicPr>
-          <p:cNvPr id="7" name="그림 6">
+          <p:cNvPr id="6" name="그림 5" descr="라인, 그래프, 텍스트, 도표이(가) 표시된 사진&#10;&#10;AI 생성 콘텐츠는 정확하지 않을 수 있습니다.">
             <a:extLst>
               <a:ext uri="{FF2B5EF4-FFF2-40B4-BE49-F238E27FC236}">
-                <a16:creationId xmlns:a16="http://schemas.microsoft.com/office/drawing/2014/main" id="{293AE056-DA16-A82D-DD7F-629E5B2163B6}"/>
+                <a16:creationId xmlns:a16="http://schemas.microsoft.com/office/drawing/2014/main" id="{21279A56-8182-CA7B-5AE6-1B0F877F2175}"/>
               </a:ext>
             </a:extLst>
           </p:cNvPr>
@@ -8588,74 +8631,14 @@
         </p:blipFill>
         <p:spPr>
           <a:xfrm>
-            <a:off x="1578839" y="1504122"/>
-            <a:ext cx="2924583" cy="2419688"/>
+            <a:off x="4640580" y="1169662"/>
+            <a:ext cx="3852370" cy="2037525"/>
           </a:xfrm>
           <a:prstGeom prst="rect">
             <a:avLst/>
           </a:prstGeom>
         </p:spPr>
       </p:pic>
-      <p:sp>
-        <p:nvSpPr>
-          <p:cNvPr id="8" name="TextBox 7">
-            <a:extLst>
-              <a:ext uri="{FF2B5EF4-FFF2-40B4-BE49-F238E27FC236}">
-                <a16:creationId xmlns:a16="http://schemas.microsoft.com/office/drawing/2014/main" id="{026F5AC5-0B6B-D7EA-F918-9B251AD22C41}"/>
-              </a:ext>
-            </a:extLst>
-          </p:cNvPr>
-          <p:cNvSpPr txBox="1"/>
-          <p:nvPr/>
-        </p:nvSpPr>
-        <p:spPr>
-          <a:xfrm>
-            <a:off x="4732020" y="3531395"/>
-            <a:ext cx="3695700" cy="261610"/>
-          </a:xfrm>
-          <a:prstGeom prst="rect">
-            <a:avLst/>
-          </a:prstGeom>
-          <a:noFill/>
-        </p:spPr>
-        <p:txBody>
-          <a:bodyPr wrap="square" rtlCol="0">
-            <a:spAutoFit/>
-          </a:bodyPr>
-          <a:lstStyle/>
-          <a:p>
-            <a:pPr algn="ctr"/>
-            <a:r>
-              <a:rPr lang="en-US" altLang="ko-KR" sz="1100" b="1" dirty="0"/>
-              <a:t>- </a:t>
-            </a:r>
-            <a:r>
-              <a:rPr lang="ko-KR" altLang="en-US" sz="1100" b="1" dirty="0"/>
-              <a:t>총 </a:t>
-            </a:r>
-            <a:r>
-              <a:rPr lang="en-US" altLang="ko-KR" sz="1100" b="1" dirty="0"/>
-              <a:t>800</a:t>
-            </a:r>
-            <a:r>
-              <a:rPr lang="ko-KR" altLang="en-US" sz="1100" b="1" dirty="0"/>
-              <a:t>번의 </a:t>
-            </a:r>
-            <a:r>
-              <a:rPr lang="en-US" altLang="ko-KR" sz="1100" b="1" dirty="0"/>
-              <a:t>Step</a:t>
-            </a:r>
-            <a:r>
-              <a:rPr lang="ko-KR" altLang="en-US" sz="1100" b="1"/>
-              <a:t>을 거친 </a:t>
-            </a:r>
-            <a:r>
-              <a:rPr lang="ko-KR" altLang="en-US" sz="1100" b="1" dirty="0"/>
-              <a:t>결과물을 통해 예측 결과 생성</a:t>
-            </a:r>
-          </a:p>
-        </p:txBody>
-      </p:sp>
     </p:spTree>
     <p:extLst>
       <p:ext uri="{BB962C8B-B14F-4D97-AF65-F5344CB8AC3E}">
